--- a/結果発表.pptx
+++ b/結果発表.pptx
@@ -8876,7 +8876,7 @@
                 <a:latin typeface="Arial"/>
                 <a:ea typeface="DejaVu Sans"/>
               </a:rPr>
-              <a:t>かもがわデンジャラス</a:t>
+              <a:t>かもがわモーターズ</a:t>
             </a:r>
             <a:endParaRPr lang="en-US" sz="4000" b="0" strike="noStrike" spc="-1">
               <a:solidFill>
@@ -9010,7 +9010,7 @@
                 <a:latin typeface="Arial"/>
                 <a:ea typeface="DejaVu Sans"/>
               </a:rPr>
-              <a:t>かもがわモーターズ</a:t>
+              <a:t>かもがわデンジャラス</a:t>
             </a:r>
             <a:endParaRPr lang="en-US" sz="4000" b="0" strike="noStrike" spc="-1" dirty="0">
               <a:solidFill>
@@ -9946,7 +9946,7 @@
                 <a:latin typeface="Arial"/>
                 <a:ea typeface="DejaVu Sans"/>
               </a:rPr>
-              <a:t>かもがわデンジャラス</a:t>
+              <a:t>かもがわモーターズ</a:t>
             </a:r>
             <a:endParaRPr lang="en-US" sz="4000" b="0" strike="noStrike" spc="-1" dirty="0">
               <a:solidFill>
@@ -10080,7 +10080,7 @@
                 <a:latin typeface="Arial"/>
                 <a:ea typeface="DejaVu Sans"/>
               </a:rPr>
-              <a:t>かもがわモーターズ</a:t>
+              <a:t>かもがわデンジャラス</a:t>
             </a:r>
             <a:endParaRPr lang="en-US" sz="4000" b="0" strike="noStrike" spc="-1" dirty="0">
               <a:solidFill>
